--- a/reports/airline_satisfaction_ppt.pptx
+++ b/reports/airline_satisfaction_ppt.pptx
@@ -5673,7 +5673,7 @@
               </a:spcAft>
             </a:pPr>
             <a:r>
-              <a:rPr sz="850" b="0" i="0">
+              <a:rPr sz="900" b="0" i="0">
                 <a:solidFill>
                   <a:srgbClr val="64748B"/>
                 </a:solidFill>
@@ -8977,7 +8977,7 @@
                 <a:ea typeface="Microsoft YaHei"/>
                 <a:cs typeface="Microsoft YaHei"/>
               </a:rPr>
-              <a:t>✅ 已完成</a:t>
+              <a:t>✓ 已完成</a:t>
             </a:r>
           </a:p>
         </p:txBody>
@@ -9333,7 +9333,7 @@
                 <a:ea typeface="Microsoft YaHei"/>
                 <a:cs typeface="Microsoft YaHei"/>
               </a:rPr>
-              <a:t>✅ 已完成</a:t>
+              <a:t>✓ 已完成</a:t>
             </a:r>
           </a:p>
         </p:txBody>
@@ -9689,7 +9689,7 @@
                 <a:ea typeface="Microsoft YaHei"/>
                 <a:cs typeface="Microsoft YaHei"/>
               </a:rPr>
-              <a:t>✅ 已完成</a:t>
+              <a:t>✓ 已完成</a:t>
             </a:r>
           </a:p>
         </p:txBody>
@@ -10555,7 +10555,7 @@
         <p:spPr>
           <a:xfrm>
             <a:off x="8881567" y="5513832"/>
-            <a:ext cx="2514600" cy="274320"/>
+            <a:ext cx="2514600" cy="320040"/>
           </a:xfrm>
           <a:prstGeom prst="rect">
             <a:avLst/>
@@ -10577,7 +10577,7 @@
               </a:spcAft>
             </a:pPr>
             <a:r>
-              <a:rPr sz="1600" b="1" i="0">
+              <a:rPr sz="1550" b="1" i="0">
                 <a:solidFill>
                   <a:srgbClr val="D97706"/>
                 </a:solidFill>
@@ -10621,7 +10621,7 @@
               </a:spcAft>
             </a:pPr>
             <a:r>
-              <a:rPr sz="880" b="0" i="0">
+              <a:rPr sz="900" b="0" i="0">
                 <a:solidFill>
                   <a:srgbClr val="64748B"/>
                 </a:solidFill>
@@ -10629,7 +10629,7 @@
                 <a:ea typeface="Microsoft YaHei"/>
                 <a:cs typeface="Microsoft YaHei"/>
               </a:rPr>
-              <a:t>剩余：PPT 双格式导出 · 双面打印装订 · 预答辩彩排 2 遍</a:t>
+              <a:t>工程验收：119 pytest · verify 34/34 · 全链路可重建 ｜ 剩余：PPT 导出 · 双面打印 · 预答辩彩排</a:t>
             </a:r>
           </a:p>
         </p:txBody>
@@ -11685,7 +11685,7 @@
         <p:spPr>
           <a:xfrm>
             <a:off x="7360920" y="1481328"/>
-            <a:ext cx="4261104" cy="4526280"/>
+            <a:ext cx="4261104" cy="4407408"/>
           </a:xfrm>
           <a:prstGeom prst="roundRect">
             <a:avLst>
@@ -11733,7 +11733,7 @@
         <p:spPr>
           <a:xfrm>
             <a:off x="7360920" y="1591056"/>
-            <a:ext cx="50292" cy="4306824"/>
+            <a:ext cx="50292" cy="4187952"/>
           </a:xfrm>
           <a:prstGeom prst="rect">
             <a:avLst/>
@@ -14358,7 +14358,7 @@
         </p:nvGraphicFramePr>
         <p:xfrm>
           <a:off x="566928" y="1737360"/>
-          <a:ext cx="4242816" cy="3246117"/>
+          <a:ext cx="4411978" cy="3246117"/>
         </p:xfrm>
         <a:graphic>
           <a:graphicData uri="http://schemas.openxmlformats.org/drawingml/2006/table">
@@ -14367,10 +14367,10 @@
                 <a:tableStyleId>{5C22544A-7EE6-4342-B048-85BDC9FD1C3A}</a:tableStyleId>
               </a:tblPr>
               <a:tblGrid>
-                <a:gridCol w="658368"/>
-                <a:gridCol w="2331720"/>
-                <a:gridCol w="566928"/>
-                <a:gridCol w="685800"/>
+                <a:gridCol w="684617"/>
+                <a:gridCol w="2424687"/>
+                <a:gridCol w="589531"/>
+                <a:gridCol w="713143"/>
               </a:tblGrid>
               <a:tr h="463731">
                 <a:tc>
@@ -14515,7 +14515,7 @@
                           <a:ea typeface="Microsoft YaHei"/>
                           <a:cs typeface="Microsoft YaHei"/>
                         </a:rPr>
-                        <a:t>原始 21 特征 + 缺失标记</a:t>
+                        <a:t>原始 21 特征 + arr_delay_missing</a:t>
                       </a:r>
                     </a:p>
                   </a:txBody>
@@ -15144,7 +15144,7 @@
         </p:nvGraphicFramePr>
         <p:xfrm>
           <a:off x="5138928" y="1737360"/>
-          <a:ext cx="5257800" cy="3246117"/>
+          <a:ext cx="6446516" cy="3246117"/>
         </p:xfrm>
         <a:graphic>
           <a:graphicData uri="http://schemas.openxmlformats.org/drawingml/2006/table">
@@ -15153,12 +15153,12 @@
                 <a:tableStyleId>{5C22544A-7EE6-4342-B048-85BDC9FD1C3A}</a:tableStyleId>
               </a:tblPr>
               <a:tblGrid>
-                <a:gridCol w="1051560"/>
-                <a:gridCol w="502920"/>
-                <a:gridCol w="960120"/>
-                <a:gridCol w="914400"/>
-                <a:gridCol w="914400"/>
-                <a:gridCol w="914400"/>
+                <a:gridCol w="1289304"/>
+                <a:gridCol w="616623"/>
+                <a:gridCol w="1177190"/>
+                <a:gridCol w="1121133"/>
+                <a:gridCol w="1121133"/>
+                <a:gridCol w="1121133"/>
               </a:tblGrid>
               <a:tr h="463731">
                 <a:tc>
@@ -16236,8 +16236,8 @@
         </p:nvSpPr>
         <p:spPr>
           <a:xfrm>
-            <a:off x="566928" y="5257800"/>
-            <a:ext cx="3584448" cy="841248"/>
+            <a:off x="566928" y="5230368"/>
+            <a:ext cx="3584448" cy="914400"/>
           </a:xfrm>
           <a:prstGeom prst="roundRect">
             <a:avLst>
@@ -16284,8 +16284,8 @@
         </p:nvSpPr>
         <p:spPr>
           <a:xfrm>
-            <a:off x="566928" y="5367528"/>
-            <a:ext cx="50292" cy="621792"/>
+            <a:off x="566928" y="5340096"/>
+            <a:ext cx="50292" cy="694944"/>
           </a:xfrm>
           <a:prstGeom prst="rect">
             <a:avLst/>
@@ -16328,7 +16328,7 @@
         </p:nvSpPr>
         <p:spPr>
           <a:xfrm>
-            <a:off x="731520" y="5367528"/>
+            <a:off x="731520" y="5321807"/>
             <a:ext cx="1463040" cy="228600"/>
           </a:xfrm>
           <a:prstGeom prst="rect">
@@ -16372,7 +16372,7 @@
         </p:nvSpPr>
         <p:spPr>
           <a:xfrm>
-            <a:off x="731520" y="5586984"/>
+            <a:off x="731520" y="5532120"/>
             <a:ext cx="3246120" cy="256032"/>
           </a:xfrm>
           <a:prstGeom prst="rect">
@@ -16416,8 +16416,8 @@
         </p:nvSpPr>
         <p:spPr>
           <a:xfrm>
-            <a:off x="731520" y="5861304"/>
-            <a:ext cx="3246120" cy="201168"/>
+            <a:off x="731520" y="5797296"/>
+            <a:ext cx="3246120" cy="310896"/>
           </a:xfrm>
           <a:prstGeom prst="rect">
             <a:avLst/>
@@ -16439,7 +16439,7 @@
               </a:spcAft>
             </a:pPr>
             <a:r>
-              <a:rPr sz="880" b="0" i="0">
+              <a:rPr sz="900" b="0" i="0">
                 <a:solidFill>
                   <a:srgbClr val="475569"/>
                 </a:solidFill>
@@ -16460,8 +16460,8 @@
         </p:nvSpPr>
         <p:spPr>
           <a:xfrm>
-            <a:off x="4297680" y="5257800"/>
-            <a:ext cx="3584448" cy="841248"/>
+            <a:off x="4297680" y="5230368"/>
+            <a:ext cx="3584448" cy="914400"/>
           </a:xfrm>
           <a:prstGeom prst="roundRect">
             <a:avLst>
@@ -16508,8 +16508,8 @@
         </p:nvSpPr>
         <p:spPr>
           <a:xfrm>
-            <a:off x="4297680" y="5367528"/>
-            <a:ext cx="50292" cy="621792"/>
+            <a:off x="4297680" y="5340096"/>
+            <a:ext cx="50292" cy="694944"/>
           </a:xfrm>
           <a:prstGeom prst="rect">
             <a:avLst/>
@@ -16552,7 +16552,7 @@
         </p:nvSpPr>
         <p:spPr>
           <a:xfrm>
-            <a:off x="4462272" y="5367528"/>
+            <a:off x="4462272" y="5321807"/>
             <a:ext cx="1463040" cy="228600"/>
           </a:xfrm>
           <a:prstGeom prst="rect">
@@ -16596,7 +16596,7 @@
         </p:nvSpPr>
         <p:spPr>
           <a:xfrm>
-            <a:off x="4462272" y="5586984"/>
+            <a:off x="4462272" y="5532120"/>
             <a:ext cx="3246120" cy="256032"/>
           </a:xfrm>
           <a:prstGeom prst="rect">
@@ -16640,8 +16640,8 @@
         </p:nvSpPr>
         <p:spPr>
           <a:xfrm>
-            <a:off x="4462272" y="5861304"/>
-            <a:ext cx="3246120" cy="201168"/>
+            <a:off x="4462272" y="5797296"/>
+            <a:ext cx="3246120" cy="310896"/>
           </a:xfrm>
           <a:prstGeom prst="rect">
             <a:avLst/>
@@ -16663,7 +16663,7 @@
               </a:spcAft>
             </a:pPr>
             <a:r>
-              <a:rPr sz="880" b="0" i="0">
+              <a:rPr sz="900" b="0" i="0">
                 <a:solidFill>
                   <a:srgbClr val="475569"/>
                 </a:solidFill>
@@ -16684,8 +16684,8 @@
         </p:nvSpPr>
         <p:spPr>
           <a:xfrm>
-            <a:off x="8028432" y="5257800"/>
-            <a:ext cx="3584448" cy="841248"/>
+            <a:off x="8028432" y="5230368"/>
+            <a:ext cx="3584448" cy="914400"/>
           </a:xfrm>
           <a:prstGeom prst="roundRect">
             <a:avLst>
@@ -16732,8 +16732,8 @@
         </p:nvSpPr>
         <p:spPr>
           <a:xfrm>
-            <a:off x="8028432" y="5367528"/>
-            <a:ext cx="50292" cy="621792"/>
+            <a:off x="8028432" y="5340096"/>
+            <a:ext cx="50292" cy="694944"/>
           </a:xfrm>
           <a:prstGeom prst="rect">
             <a:avLst/>
@@ -16776,7 +16776,7 @@
         </p:nvSpPr>
         <p:spPr>
           <a:xfrm>
-            <a:off x="8193024" y="5367528"/>
+            <a:off x="8193024" y="5321807"/>
             <a:ext cx="1463040" cy="228600"/>
           </a:xfrm>
           <a:prstGeom prst="rect">
@@ -16820,7 +16820,7 @@
         </p:nvSpPr>
         <p:spPr>
           <a:xfrm>
-            <a:off x="8193024" y="5586984"/>
+            <a:off x="8193024" y="5532120"/>
             <a:ext cx="3246120" cy="256032"/>
           </a:xfrm>
           <a:prstGeom prst="rect">
@@ -16864,8 +16864,8 @@
         </p:nvSpPr>
         <p:spPr>
           <a:xfrm>
-            <a:off x="8193024" y="5861304"/>
-            <a:ext cx="3246120" cy="201168"/>
+            <a:off x="8193024" y="5797296"/>
+            <a:ext cx="3246120" cy="310896"/>
           </a:xfrm>
           <a:prstGeom prst="rect">
             <a:avLst/>
@@ -16887,7 +16887,7 @@
               </a:spcAft>
             </a:pPr>
             <a:r>
-              <a:rPr sz="880" b="0" i="0">
+              <a:rPr sz="900" b="0" i="0">
                 <a:solidFill>
                   <a:srgbClr val="475569"/>
                 </a:solidFill>
@@ -16908,8 +16908,8 @@
         </p:nvSpPr>
         <p:spPr>
           <a:xfrm>
-            <a:off x="566928" y="6199632"/>
-            <a:ext cx="11057839" cy="219456"/>
+            <a:off x="566928" y="6236208"/>
+            <a:ext cx="11057839" cy="201168"/>
           </a:xfrm>
           <a:prstGeom prst="rect">
             <a:avLst/>
@@ -16931,7 +16931,7 @@
               </a:spcAft>
             </a:pPr>
             <a:r>
-              <a:rPr sz="860" b="0" i="0">
+              <a:rPr sz="900" b="0" i="0">
                 <a:solidFill>
                   <a:srgbClr val="64748B"/>
                 </a:solidFill>
@@ -17458,8 +17458,8 @@
         </p:nvSpPr>
         <p:spPr>
           <a:xfrm>
-            <a:off x="795528" y="1847088"/>
-            <a:ext cx="2194560" cy="566928"/>
+            <a:off x="795528" y="1828800"/>
+            <a:ext cx="2194560" cy="640080"/>
           </a:xfrm>
           <a:prstGeom prst="rect">
             <a:avLst/>
@@ -17502,7 +17502,7 @@
         </p:nvSpPr>
         <p:spPr>
           <a:xfrm>
-            <a:off x="795528" y="2432304"/>
+            <a:off x="795528" y="2487168"/>
             <a:ext cx="2286000" cy="256032"/>
           </a:xfrm>
           <a:prstGeom prst="rect">
@@ -17634,8 +17634,8 @@
         </p:nvSpPr>
         <p:spPr>
           <a:xfrm>
-            <a:off x="3474720" y="1847088"/>
-            <a:ext cx="2103120" cy="566928"/>
+            <a:off x="3474720" y="1828800"/>
+            <a:ext cx="2103120" cy="640080"/>
           </a:xfrm>
           <a:prstGeom prst="rect">
             <a:avLst/>
@@ -17678,7 +17678,7 @@
         </p:nvSpPr>
         <p:spPr>
           <a:xfrm>
-            <a:off x="3474720" y="2432304"/>
+            <a:off x="3474720" y="2487168"/>
             <a:ext cx="2194560" cy="256032"/>
           </a:xfrm>
           <a:prstGeom prst="rect">
@@ -18149,7 +18149,7 @@
                 <a:ea typeface="Microsoft YaHei"/>
                 <a:cs typeface="Microsoft YaHei"/>
               </a:rPr>
-              <a:t>Logloss 目标输出校准概率，满足“提交概率”。</a:t>
+              <a:t>Logloss 目标输出良好校准的概率，满足“提交概率”。</a:t>
             </a:r>
           </a:p>
         </p:txBody>
@@ -19434,7 +19434,7 @@
         </p:nvGraphicFramePr>
         <p:xfrm>
           <a:off x="6675120" y="4526280"/>
-          <a:ext cx="4434840" cy="1143000"/>
+          <a:ext cx="4846319" cy="1143000"/>
         </p:xfrm>
         <a:graphic>
           <a:graphicData uri="http://schemas.openxmlformats.org/drawingml/2006/table">
@@ -19443,9 +19443,9 @@
                 <a:tableStyleId>{5C22544A-7EE6-4342-B048-85BDC9FD1C3A}</a:tableStyleId>
               </a:tblPr>
               <a:tblGrid>
-                <a:gridCol w="1325880"/>
-                <a:gridCol w="1600200"/>
-                <a:gridCol w="1508760"/>
+                <a:gridCol w="1448899"/>
+                <a:gridCol w="1748672"/>
+                <a:gridCol w="1648748"/>
               </a:tblGrid>
               <a:tr h="285750">
                 <a:tc>
@@ -20317,7 +20317,7 @@
               </a:spcAft>
             </a:pPr>
             <a:r>
-              <a:rPr sz="880" b="0" i="0">
+              <a:rPr sz="900" b="0" i="0">
                 <a:solidFill>
                   <a:srgbClr val="64748B"/>
                 </a:solidFill>
@@ -20453,7 +20453,7 @@
               </a:spcAft>
             </a:pPr>
             <a:r>
-              <a:rPr sz="880" b="0" i="0">
+              <a:rPr sz="900" b="0" i="0">
                 <a:solidFill>
                   <a:srgbClr val="64748B"/>
                 </a:solidFill>
@@ -20589,7 +20589,7 @@
               </a:spcAft>
             </a:pPr>
             <a:r>
-              <a:rPr sz="880" b="0" i="0">
+              <a:rPr sz="900" b="0" i="0">
                 <a:solidFill>
                   <a:srgbClr val="64748B"/>
                 </a:solidFill>
@@ -20725,7 +20725,7 @@
               </a:spcAft>
             </a:pPr>
             <a:r>
-              <a:rPr sz="880" b="0" i="0">
+              <a:rPr sz="900" b="0" i="0">
                 <a:solidFill>
                   <a:srgbClr val="64748B"/>
                 </a:solidFill>
@@ -20839,7 +20839,7 @@
               </a:spcAft>
             </a:pPr>
             <a:r>
-              <a:rPr sz="880" b="0" i="0">
+              <a:rPr sz="900" b="0" i="0">
                 <a:solidFill>
                   <a:srgbClr val="64748B"/>
                 </a:solidFill>
@@ -20953,7 +20953,7 @@
               </a:spcAft>
             </a:pPr>
             <a:r>
-              <a:rPr sz="880" b="0" i="0">
+              <a:rPr sz="900" b="0" i="0">
                 <a:solidFill>
                   <a:srgbClr val="64748B"/>
                 </a:solidFill>
@@ -21273,7 +21273,7 @@
                 <a:ea typeface="Microsoft YaHei"/>
                 <a:cs typeface="Microsoft YaHei"/>
               </a:rPr>
-              <a:t>Acc 0.9264 · P 0.9272 · R 0.9051</a:t>
+              <a:t>Prec 0.9272 · Rec 0.9051</a:t>
             </a:r>
           </a:p>
         </p:txBody>
@@ -21515,6 +21515,50 @@
                 <a:cs typeface="Microsoft YaHei"/>
               </a:rPr>
               <a:t>ECE 0.25% → 概率可直接提交。</a:t>
+            </a:r>
+          </a:p>
+        </p:txBody>
+      </p:sp>
+      <p:sp>
+        <p:nvSpPr>
+          <p:cNvPr id="40" name="TextBox 39"/>
+          <p:cNvSpPr txBox="1"/>
+          <p:nvPr/>
+        </p:nvSpPr>
+        <p:spPr>
+          <a:xfrm>
+            <a:off x="566928" y="5897880"/>
+            <a:ext cx="11057839" cy="219456"/>
+          </a:xfrm>
+          <a:prstGeom prst="rect">
+            <a:avLst/>
+          </a:prstGeom>
+          <a:noFill/>
+        </p:spPr>
+        <p:txBody>
+          <a:bodyPr wrap="square" lIns="0" rIns="0" tIns="0" bIns="0" anchor="t">
+            <a:spAutoFit/>
+          </a:bodyPr>
+          <a:lstStyle/>
+          <a:p>
+            <a:pPr algn="l">
+              <a:lnSpc>
+                <a:spcPct val="115000"/>
+              </a:lnSpc>
+              <a:spcAft>
+                <a:spcPts val="0"/>
+              </a:spcAft>
+            </a:pPr>
+            <a:r>
+              <a:rPr sz="900" b="0" i="0">
+                <a:solidFill>
+                  <a:srgbClr val="64748B"/>
+                </a:solidFill>
+                <a:latin typeface="Microsoft YaHei"/>
+                <a:ea typeface="Microsoft YaHei"/>
+                <a:cs typeface="Microsoft YaHei"/>
+              </a:rPr>
+              <a:t>最终交付 run_id=P2_final_lgbm_CT_1031_s42_final ｜ 5 折测试集平均 ｜ 299,844 行概率</a:t>
             </a:r>
           </a:p>
         </p:txBody>
@@ -22530,7 +22574,7 @@
               </a:spcAft>
             </a:pPr>
             <a:r>
-              <a:rPr sz="880" b="0" i="0">
+              <a:rPr sz="900" b="0" i="0">
                 <a:solidFill>
                   <a:srgbClr val="64748B"/>
                 </a:solidFill>
@@ -22553,7 +22597,7 @@
         </p:nvGraphicFramePr>
         <p:xfrm>
           <a:off x="7452360" y="2487168"/>
-          <a:ext cx="3931920" cy="2148840"/>
+          <a:ext cx="4160519" cy="2148840"/>
         </p:xfrm>
         <a:graphic>
           <a:graphicData uri="http://schemas.openxmlformats.org/drawingml/2006/table">
@@ -22562,10 +22606,10 @@
                 <a:tableStyleId>{5C22544A-7EE6-4342-B048-85BDC9FD1C3A}</a:tableStyleId>
               </a:tblPr>
               <a:tblGrid>
-                <a:gridCol w="731520"/>
-                <a:gridCol w="1097280"/>
-                <a:gridCol w="1051560"/>
-                <a:gridCol w="1051560"/>
+                <a:gridCol w="774050"/>
+                <a:gridCol w="1161075"/>
+                <a:gridCol w="1112697"/>
+                <a:gridCol w="1112697"/>
               </a:tblGrid>
               <a:tr h="429768">
                 <a:tc>
@@ -22760,7 +22804,7 @@
                           <a:ea typeface="Microsoft YaHei"/>
                           <a:cs typeface="Microsoft YaHei"/>
                         </a:rPr>
-                        <a:t>−0.000000</a:t>
+                        <a:t>≈0</a:t>
                       </a:r>
                     </a:p>
                   </a:txBody>
@@ -23638,7 +23682,7 @@
               </a:spcAft>
             </a:pPr>
             <a:r>
-              <a:rPr sz="880" b="0" i="0">
+              <a:rPr sz="900" b="0" i="0">
                 <a:solidFill>
                   <a:srgbClr val="64748B"/>
                 </a:solidFill>
@@ -24285,7 +24329,7 @@
                 <a:ea typeface="Microsoft YaHei"/>
                 <a:cs typeface="Microsoft YaHei"/>
               </a:rPr>
-              <a:t>这批判样本不是“差评”，而是评分组合卡在边界；按舱位做阈值/校准比继续调参更实际。</a:t>
+              <a:t>这些误判样本不是“差评”，而是评分组合卡在边界；按舱位做阈值/校准比继续调参更实际。</a:t>
             </a:r>
           </a:p>
         </p:txBody>
